--- a/copilot-cli-real-infra-deck.pptx
+++ b/copilot-cli-real-infra-deck.pptx
@@ -1393,7 +1393,7 @@
           <a:p/>
           <a:p>
             <a:r>
-              <a:t>Then /sandbox policy. Do not read it aloud -- point at the denied .env, the writable path, and allowOutbound false.</a:t>
+              <a:t>Then /sandbox. Do not read it aloud -- point at the denied .env, the writable path, and allowOutbound false.</a:t>
             </a:r>
           </a:p>
         </p:txBody>
@@ -10106,7 +10106,7 @@
                 </a:solidFill>
                 <a:latin typeface="Courier New"/>
               </a:rPr>
-              <a:t>COPILOT_HOME="$RO" copilot --experimental --sandbox \</a:t>
+              <a:t>copilot \</a:t>
             </a:r>
           </a:p>
           <a:p>
@@ -10595,7 +10595,7 @@
                 </a:solidFill>
                 <a:latin typeface="Courier New"/>
               </a:rPr>
-              <a:t>COPILOT_HOME="$RW" copilot --experimental --sandbox \</a:t>
+              <a:t>COPILOT_HOME="$LAB_HOME" copilot --experimental --sandbox \</a:t>
             </a:r>
           </a:p>
           <a:p>
@@ -10611,7 +10611,7 @@
                 </a:solidFill>
                 <a:latin typeface="Courier New"/>
               </a:rPr>
-              <a:t>  --available-tools=...,bash,edit,create,apply_patch \</a:t>
+              <a:t>  --available-tools=view,grep,glob,edit,create \</a:t>
             </a:r>
           </a:p>
           <a:p>
@@ -10627,7 +10627,7 @@
                 </a:solidFill>
                 <a:latin typeface="Courier New"/>
               </a:rPr>
-              <a:t>  --allow-tool='read,shell(git status),shell(git diff)' \</a:t>
+              <a:t>  --deny-tool='shell,write(.env)'</a:t>
             </a:r>
           </a:p>
           <a:p>
@@ -10643,7 +10643,7 @@
                 </a:solidFill>
                 <a:latin typeface="Courier New"/>
               </a:rPr>
-              <a:t>  --deny-tool='shell(git push),shell(terraform),</a:t>
+              <a:t/>
             </a:r>
           </a:p>
           <a:p>
@@ -10659,7 +10659,7 @@
                 </a:solidFill>
                 <a:latin typeface="Courier New"/>
               </a:rPr>
-              <a:t>               shell(terraform:*),shell(gcloud),shell(gcloud:*)'</a:t>
+              <a:t/>
             </a:r>
           </a:p>
         </p:txBody>
@@ -11100,7 +11100,7 @@
                 </a:solidFill>
                 <a:latin typeface="Courier New"/>
               </a:rPr>
-              <a:t>  --allow-tool='read,shell(az --version)' \</a:t>
+              <a:t>  --allow-tool='shell(az)' \</a:t>
             </a:r>
           </a:p>
           <a:p>

--- a/copilot-cli-real-infra-deck.pptx
+++ b/copilot-cli-real-infra-deck.pptx
@@ -10611,6 +10611,22 @@
                 </a:solidFill>
                 <a:latin typeface="Courier New"/>
               </a:rPr>
+              <a:t>  --disable-builtin-mcps \</a:t>
+            </a:r>
+          </a:p>
+          <a:p>
+            <a:pPr algn="l">
+              <a:lnSpc>
+                <a:spcPct val="145000"/>
+              </a:lnSpc>
+            </a:pPr>
+            <a:r>
+              <a:rPr sz="1700" b="0">
+                <a:solidFill>
+                  <a:srgbClr val="3FB950"/>
+                </a:solidFill>
+                <a:latin typeface="Courier New"/>
+              </a:rPr>
               <a:t>  --available-tools=view,grep,glob,edit,create \</a:t>
             </a:r>
           </a:p>
@@ -10623,27 +10639,11 @@
             <a:r>
               <a:rPr sz="1700" b="0">
                 <a:solidFill>
-                  <a:srgbClr val="3FB950"/>
+                  <a:srgbClr val="E6EDF3"/>
                 </a:solidFill>
                 <a:latin typeface="Courier New"/>
               </a:rPr>
               <a:t>  --deny-tool='shell,write(.env)'</a:t>
-            </a:r>
-          </a:p>
-          <a:p>
-            <a:pPr algn="l">
-              <a:lnSpc>
-                <a:spcPct val="145000"/>
-              </a:lnSpc>
-            </a:pPr>
-            <a:r>
-              <a:rPr sz="1700" b="0">
-                <a:solidFill>
-                  <a:srgbClr val="F85149"/>
-                </a:solidFill>
-                <a:latin typeface="Courier New"/>
-              </a:rPr>
-              <a:t/>
             </a:r>
           </a:p>
           <a:p>
